--- a/ppt/ch06-1 音画交响——影视音乐-中国影视音乐.pptx
+++ b/ppt/ch06-1 音画交响——影视音乐-中国影视音乐.pptx
@@ -3205,7 +3205,7 @@
       </p:sp>
       <p:pic>
         <p:nvPicPr>
-          <p:cNvPr id="5" name="Picture 4" descr="school-badge-display.png"/>
+          <p:cNvPr id="5" name="Picture 4" descr="school-logo.png"/>
           <p:cNvPicPr>
             <a:picLocks noChangeAspect="1"/>
           </p:cNvPicPr>
@@ -3219,8 +3219,32 @@
         </p:blipFill>
         <p:spPr>
           <a:xfrm>
-            <a:off x="10332720" y="457200"/>
-            <a:ext cx="1371600" cy="182458"/>
+            <a:off x="10515600" y="411480"/>
+            <a:ext cx="1051560" cy="1051560"/>
+          </a:xfrm>
+          <a:prstGeom prst="rect">
+            <a:avLst/>
+          </a:prstGeom>
+        </p:spPr>
+      </p:pic>
+      <p:pic>
+        <p:nvPicPr>
+          <p:cNvPr id="6" name="Picture 5" descr="school-name.png"/>
+          <p:cNvPicPr>
+            <a:picLocks noChangeAspect="1"/>
+          </p:cNvPicPr>
+          <p:nvPr/>
+        </p:nvPicPr>
+        <p:blipFill>
+          <a:blip r:embed="rId3"/>
+          <a:stretch>
+            <a:fillRect/>
+          </a:stretch>
+        </p:blipFill>
+        <p:spPr>
+          <a:xfrm>
+            <a:off x="640080" y="4297680"/>
+            <a:ext cx="2743200" cy="739739"/>
           </a:xfrm>
           <a:prstGeom prst="rect">
             <a:avLst/>
@@ -4416,7 +4440,7 @@
                 </a:solidFill>
                 <a:latin typeface="Microsoft YaHei"/>
               </a:rPr>
-              <a:t>• 影视音乐的分类：按作用分主题曲、插曲、主题音乐、场景音乐、背景音乐（书第79页）。 - When to use: 给一首影视曲定性。 -…</a:t>
+              <a:t>• 影视音乐的分类：按作用分主题曲、插曲、主题音乐、场景音乐、背景音乐（书第79页）。 - 何时使用： 给一首影视曲定性。 - 如何判断： …</a:t>
             </a:r>
           </a:p>
           <a:p>
